--- a/6sem/coursework_kotlin/samsung_presentation_olefriovgg.pptx
+++ b/6sem/coursework_kotlin/samsung_presentation_olefriovgg.pptx
@@ -1624,7 +1624,7 @@
               </a:spcAft>
               <a:buNone/>
             </a:pPr>
-            <a:endParaRPr/>
+            <a:endParaRPr dirty="0"/>
           </a:p>
         </p:txBody>
       </p:sp>
@@ -1719,6 +1719,480 @@
           </a:bodyPr>
           <a:lstStyle/>
           <a:p>
+            <a:r>
+              <a:rPr lang="ru-RU" sz="1200" b="0" i="0" u="none" strike="noStrike" cap="none" dirty="0" smtClean="0">
+                <a:solidFill>
+                  <a:schemeClr val="dk1"/>
+                </a:solidFill>
+                <a:effectLst/>
+                <a:latin typeface="Calibri"/>
+                <a:ea typeface="Calibri"/>
+                <a:cs typeface="Calibri"/>
+                <a:sym typeface="Calibri"/>
+              </a:rPr>
+              <a:t>Рассмотрим существующие аналоги моего приложения.</a:t>
+            </a:r>
+          </a:p>
+          <a:p>
+            <a:r>
+              <a:rPr lang="ru-RU" sz="1200" b="0" i="0" u="none" strike="noStrike" cap="none" dirty="0" smtClean="0">
+                <a:solidFill>
+                  <a:schemeClr val="dk1"/>
+                </a:solidFill>
+                <a:effectLst/>
+                <a:latin typeface="Calibri"/>
+                <a:ea typeface="Calibri"/>
+                <a:cs typeface="Calibri"/>
+                <a:sym typeface="Calibri"/>
+              </a:rPr>
+              <a:t>Наиболее</a:t>
+            </a:r>
+            <a:r>
+              <a:rPr lang="ru-RU" sz="1200" b="0" i="0" u="none" strike="noStrike" cap="none" baseline="0" dirty="0" smtClean="0">
+                <a:solidFill>
+                  <a:schemeClr val="dk1"/>
+                </a:solidFill>
+                <a:effectLst/>
+                <a:latin typeface="Calibri"/>
+                <a:ea typeface="Calibri"/>
+                <a:cs typeface="Calibri"/>
+                <a:sym typeface="Calibri"/>
+              </a:rPr>
+              <a:t> у</a:t>
+            </a:r>
+            <a:r>
+              <a:rPr lang="ru-RU" sz="1200" b="0" i="0" u="none" strike="noStrike" cap="none" dirty="0" smtClean="0">
+                <a:solidFill>
+                  <a:schemeClr val="dk1"/>
+                </a:solidFill>
+                <a:effectLst/>
+                <a:latin typeface="Calibri"/>
+                <a:ea typeface="Calibri"/>
+                <a:cs typeface="Calibri"/>
+                <a:sym typeface="Calibri"/>
+              </a:rPr>
+              <a:t>добным является </a:t>
+            </a:r>
+            <a:r>
+              <a:rPr lang="ru-RU" sz="1200" b="0" i="0" u="none" strike="noStrike" cap="none" dirty="0" err="1" smtClean="0">
+                <a:solidFill>
+                  <a:schemeClr val="dk1"/>
+                </a:solidFill>
+                <a:effectLst/>
+                <a:latin typeface="Calibri"/>
+                <a:ea typeface="Calibri"/>
+                <a:cs typeface="Calibri"/>
+                <a:sym typeface="Calibri"/>
+              </a:rPr>
+              <a:t>Spotify</a:t>
+            </a:r>
+            <a:r>
+              <a:rPr lang="ru-RU" sz="1200" b="0" i="0" u="none" strike="noStrike" cap="none" dirty="0" smtClean="0">
+                <a:solidFill>
+                  <a:schemeClr val="dk1"/>
+                </a:solidFill>
+                <a:effectLst/>
+                <a:latin typeface="Calibri"/>
+                <a:ea typeface="Calibri"/>
+                <a:cs typeface="Calibri"/>
+                <a:sym typeface="Calibri"/>
+              </a:rPr>
+              <a:t> по нескольким причинам:</a:t>
+            </a:r>
+          </a:p>
+          <a:p>
+            <a:pPr lvl="0"/>
+            <a:r>
+              <a:rPr lang="ru-RU" sz="1200" b="0" i="0" u="none" strike="noStrike" cap="none" dirty="0" smtClean="0">
+                <a:solidFill>
+                  <a:schemeClr val="dk1"/>
+                </a:solidFill>
+                <a:effectLst/>
+                <a:latin typeface="Calibri"/>
+                <a:ea typeface="Calibri"/>
+                <a:cs typeface="Calibri"/>
+                <a:sym typeface="Calibri"/>
+              </a:rPr>
+              <a:t>Самая большая библиотека треков в мире. </a:t>
+            </a:r>
+          </a:p>
+          <a:p>
+            <a:pPr lvl="0"/>
+            <a:r>
+              <a:rPr lang="ru-RU" sz="1200" b="0" i="0" u="none" strike="noStrike" cap="none" dirty="0" smtClean="0">
+                <a:solidFill>
+                  <a:schemeClr val="dk1"/>
+                </a:solidFill>
+                <a:effectLst/>
+                <a:latin typeface="Calibri"/>
+                <a:ea typeface="Calibri"/>
+                <a:cs typeface="Calibri"/>
+                <a:sym typeface="Calibri"/>
+              </a:rPr>
+              <a:t>Одни из лучших алгоритмов рекомендаций. </a:t>
+            </a:r>
+          </a:p>
+          <a:p>
+            <a:pPr lvl="0"/>
+            <a:r>
+              <a:rPr lang="ru-RU" sz="1200" b="0" i="0" u="none" strike="noStrike" cap="none" dirty="0" smtClean="0">
+                <a:solidFill>
+                  <a:schemeClr val="dk1"/>
+                </a:solidFill>
+                <a:effectLst/>
+                <a:latin typeface="Calibri"/>
+                <a:ea typeface="Calibri"/>
+                <a:cs typeface="Calibri"/>
+                <a:sym typeface="Calibri"/>
+              </a:rPr>
+              <a:t>Кроссплатформенность. </a:t>
+            </a:r>
+          </a:p>
+          <a:p>
+            <a:r>
+              <a:rPr lang="ru-RU" sz="1200" b="0" i="0" u="none" strike="noStrike" cap="none" dirty="0" smtClean="0">
+                <a:solidFill>
+                  <a:schemeClr val="dk1"/>
+                </a:solidFill>
+                <a:effectLst/>
+                <a:latin typeface="Calibri"/>
+                <a:ea typeface="Calibri"/>
+                <a:cs typeface="Calibri"/>
+                <a:sym typeface="Calibri"/>
+              </a:rPr>
+              <a:t>Однако в России </a:t>
+            </a:r>
+            <a:r>
+              <a:rPr lang="ru-RU" sz="1200" b="0" i="0" u="none" strike="noStrike" cap="none" dirty="0" err="1" smtClean="0">
+                <a:solidFill>
+                  <a:schemeClr val="dk1"/>
+                </a:solidFill>
+                <a:effectLst/>
+                <a:latin typeface="Calibri"/>
+                <a:ea typeface="Calibri"/>
+                <a:cs typeface="Calibri"/>
+                <a:sym typeface="Calibri"/>
+              </a:rPr>
+              <a:t>Spotify</a:t>
+            </a:r>
+            <a:r>
+              <a:rPr lang="ru-RU" sz="1200" b="0" i="0" u="none" strike="noStrike" cap="none" dirty="0" smtClean="0">
+                <a:solidFill>
+                  <a:schemeClr val="dk1"/>
+                </a:solidFill>
+                <a:effectLst/>
+                <a:latin typeface="Calibri"/>
+                <a:ea typeface="Calibri"/>
+                <a:cs typeface="Calibri"/>
+                <a:sym typeface="Calibri"/>
+              </a:rPr>
+              <a:t> официально недоступен, поэтому для его использования требуется VPN и зарубежный способ оплаты.</a:t>
+            </a:r>
+          </a:p>
+          <a:p>
+            <a:r>
+              <a:rPr lang="ru-RU" sz="1200" b="0" i="0" u="none" strike="noStrike" cap="none" dirty="0" smtClean="0">
+                <a:solidFill>
+                  <a:schemeClr val="dk1"/>
+                </a:solidFill>
+                <a:effectLst/>
+                <a:latin typeface="Calibri"/>
+                <a:ea typeface="Calibri"/>
+                <a:cs typeface="Calibri"/>
+                <a:sym typeface="Calibri"/>
+              </a:rPr>
+              <a:t>Из плюсов </a:t>
+            </a:r>
+            <a:r>
+              <a:rPr lang="ru-RU" sz="1200" b="1" i="0" u="none" strike="noStrike" cap="none" dirty="0" smtClean="0">
+                <a:solidFill>
+                  <a:schemeClr val="dk1"/>
+                </a:solidFill>
+                <a:effectLst/>
+                <a:latin typeface="Calibri"/>
+                <a:ea typeface="Calibri"/>
+                <a:cs typeface="Calibri"/>
+                <a:sym typeface="Calibri"/>
+              </a:rPr>
+              <a:t>VK Музыки </a:t>
+            </a:r>
+            <a:r>
+              <a:rPr lang="ru-RU" sz="1200" b="0" i="0" u="none" strike="noStrike" cap="none" dirty="0" smtClean="0">
+                <a:solidFill>
+                  <a:schemeClr val="dk1"/>
+                </a:solidFill>
+                <a:effectLst/>
+                <a:latin typeface="Calibri"/>
+                <a:ea typeface="Calibri"/>
+                <a:cs typeface="Calibri"/>
+                <a:sym typeface="Calibri"/>
+              </a:rPr>
+              <a:t>можно выделить то, что сервис встроен в социальную сеть </a:t>
+            </a:r>
+            <a:r>
+              <a:rPr lang="ru-RU" sz="1200" b="0" i="0" u="none" strike="noStrike" cap="none" dirty="0" err="1" smtClean="0">
+                <a:solidFill>
+                  <a:schemeClr val="dk1"/>
+                </a:solidFill>
+                <a:effectLst/>
+                <a:latin typeface="Calibri"/>
+                <a:ea typeface="Calibri"/>
+                <a:cs typeface="Calibri"/>
+                <a:sym typeface="Calibri"/>
+              </a:rPr>
+              <a:t>Вконтакте</a:t>
+            </a:r>
+            <a:endParaRPr lang="ru-RU" sz="1200" b="0" i="0" u="none" strike="noStrike" cap="none" dirty="0" smtClean="0">
+              <a:solidFill>
+                <a:schemeClr val="dk1"/>
+              </a:solidFill>
+              <a:effectLst/>
+              <a:latin typeface="Calibri"/>
+              <a:ea typeface="Calibri"/>
+              <a:cs typeface="Calibri"/>
+              <a:sym typeface="Calibri"/>
+            </a:endParaRPr>
+          </a:p>
+          <a:p>
+            <a:r>
+              <a:rPr lang="ru-RU" sz="1200" b="0" i="0" u="none" strike="noStrike" cap="none" dirty="0" smtClean="0">
+                <a:solidFill>
+                  <a:schemeClr val="dk1"/>
+                </a:solidFill>
+                <a:effectLst/>
+                <a:latin typeface="Calibri"/>
+                <a:ea typeface="Calibri"/>
+                <a:cs typeface="Calibri"/>
+                <a:sym typeface="Calibri"/>
+              </a:rPr>
+              <a:t>Из минусов можно отметить, что нельзя</a:t>
+            </a:r>
+            <a:r>
+              <a:rPr lang="ru-RU" sz="1200" b="0" i="0" u="none" strike="noStrike" cap="none" baseline="0" dirty="0" smtClean="0">
+                <a:solidFill>
+                  <a:schemeClr val="dk1"/>
+                </a:solidFill>
+                <a:effectLst/>
+                <a:latin typeface="Calibri"/>
+                <a:ea typeface="Calibri"/>
+                <a:cs typeface="Calibri"/>
+                <a:sym typeface="Calibri"/>
+              </a:rPr>
+              <a:t> слушать музыку с </a:t>
+            </a:r>
+            <a:r>
+              <a:rPr lang="ru-RU" sz="1200" b="0" i="0" u="none" strike="noStrike" cap="none" dirty="0" smtClean="0">
+                <a:solidFill>
+                  <a:schemeClr val="dk1"/>
+                </a:solidFill>
+                <a:effectLst/>
+                <a:latin typeface="Calibri"/>
+                <a:ea typeface="Calibri"/>
+                <a:cs typeface="Calibri"/>
+                <a:sym typeface="Calibri"/>
+              </a:rPr>
+              <a:t>VPN. Также в библиотеке отсутствует часть зарубежных исполнителей и новых мировых релизов.</a:t>
+            </a:r>
+          </a:p>
+          <a:p>
+            <a:r>
+              <a:rPr lang="ru-RU" sz="1200" b="1" i="0" u="none" strike="noStrike" cap="none" dirty="0" smtClean="0">
+                <a:solidFill>
+                  <a:schemeClr val="dk1"/>
+                </a:solidFill>
+                <a:effectLst/>
+                <a:latin typeface="Calibri"/>
+                <a:ea typeface="Calibri"/>
+                <a:cs typeface="Calibri"/>
+                <a:sym typeface="Calibri"/>
+              </a:rPr>
+              <a:t>Плюсы Яндекс Музыки:</a:t>
+            </a:r>
+            <a:endParaRPr lang="ru-RU" sz="1200" b="0" i="0" u="none" strike="noStrike" cap="none" dirty="0" smtClean="0">
+              <a:solidFill>
+                <a:schemeClr val="dk1"/>
+              </a:solidFill>
+              <a:effectLst/>
+              <a:latin typeface="Calibri"/>
+              <a:ea typeface="Calibri"/>
+              <a:cs typeface="Calibri"/>
+              <a:sym typeface="Calibri"/>
+            </a:endParaRPr>
+          </a:p>
+          <a:p>
+            <a:pPr lvl="0"/>
+            <a:r>
+              <a:rPr lang="ru-RU" sz="1200" b="0" i="0" u="none" strike="noStrike" cap="none" dirty="0" smtClean="0">
+                <a:solidFill>
+                  <a:schemeClr val="dk1"/>
+                </a:solidFill>
+                <a:effectLst/>
+                <a:latin typeface="Calibri"/>
+                <a:ea typeface="Calibri"/>
+                <a:cs typeface="Calibri"/>
+                <a:sym typeface="Calibri"/>
+              </a:rPr>
+              <a:t>Хорошие персональные рекомендации. </a:t>
+            </a:r>
+          </a:p>
+          <a:p>
+            <a:pPr lvl="0"/>
+            <a:r>
+              <a:rPr lang="ru-RU" sz="1200" b="0" i="0" u="none" strike="noStrike" cap="none" dirty="0" smtClean="0">
+                <a:solidFill>
+                  <a:schemeClr val="dk1"/>
+                </a:solidFill>
+                <a:effectLst/>
+                <a:latin typeface="Calibri"/>
+                <a:ea typeface="Calibri"/>
+                <a:cs typeface="Calibri"/>
+                <a:sym typeface="Calibri"/>
+              </a:rPr>
+              <a:t>Высокое качество звука, включая поддержку </a:t>
+            </a:r>
+            <a:r>
+              <a:rPr lang="ru-RU" sz="1200" b="0" i="0" u="none" strike="noStrike" cap="none" dirty="0" err="1" smtClean="0">
+                <a:solidFill>
+                  <a:schemeClr val="dk1"/>
+                </a:solidFill>
+                <a:effectLst/>
+                <a:latin typeface="Calibri"/>
+                <a:ea typeface="Calibri"/>
+                <a:cs typeface="Calibri"/>
+                <a:sym typeface="Calibri"/>
+              </a:rPr>
+              <a:t>Lossless</a:t>
+            </a:r>
+            <a:r>
+              <a:rPr lang="ru-RU" sz="1200" b="0" i="0" u="none" strike="noStrike" cap="none" dirty="0" smtClean="0">
+                <a:solidFill>
+                  <a:schemeClr val="dk1"/>
+                </a:solidFill>
+                <a:effectLst/>
+                <a:latin typeface="Calibri"/>
+                <a:ea typeface="Calibri"/>
+                <a:cs typeface="Calibri"/>
+                <a:sym typeface="Calibri"/>
+              </a:rPr>
+              <a:t>. </a:t>
+            </a:r>
+          </a:p>
+          <a:p>
+            <a:pPr lvl="0"/>
+            <a:r>
+              <a:rPr lang="ru-RU" sz="1200" b="0" i="0" u="none" strike="noStrike" cap="none" dirty="0" smtClean="0">
+                <a:solidFill>
+                  <a:schemeClr val="dk1"/>
+                </a:solidFill>
+                <a:effectLst/>
+                <a:latin typeface="Calibri"/>
+                <a:ea typeface="Calibri"/>
+                <a:cs typeface="Calibri"/>
+                <a:sym typeface="Calibri"/>
+              </a:rPr>
+              <a:t>Возможность скачивать музыку и слушать её офлайн. </a:t>
+            </a:r>
+          </a:p>
+          <a:p>
+            <a:pPr lvl="0"/>
+            <a:r>
+              <a:rPr lang="ru-RU" sz="1200" b="0" i="0" u="none" strike="noStrike" cap="none" dirty="0" smtClean="0">
+                <a:solidFill>
+                  <a:schemeClr val="dk1"/>
+                </a:solidFill>
+                <a:effectLst/>
+                <a:latin typeface="Calibri"/>
+                <a:ea typeface="Calibri"/>
+                <a:cs typeface="Calibri"/>
+                <a:sym typeface="Calibri"/>
+              </a:rPr>
+              <a:t>Интеграция с экосистемой Яндекса: Алиса, Станции, </a:t>
+            </a:r>
+            <a:r>
+              <a:rPr lang="ru-RU" sz="1200" b="0" i="0" u="none" strike="noStrike" cap="none" dirty="0" err="1" smtClean="0">
+                <a:solidFill>
+                  <a:schemeClr val="dk1"/>
+                </a:solidFill>
+                <a:effectLst/>
+                <a:latin typeface="Calibri"/>
+                <a:ea typeface="Calibri"/>
+                <a:cs typeface="Calibri"/>
+                <a:sym typeface="Calibri"/>
+              </a:rPr>
+              <a:t>Кинопоиск</a:t>
+            </a:r>
+            <a:r>
+              <a:rPr lang="ru-RU" sz="1200" b="0" i="0" u="none" strike="noStrike" cap="none" dirty="0" smtClean="0">
+                <a:solidFill>
+                  <a:schemeClr val="dk1"/>
+                </a:solidFill>
+                <a:effectLst/>
+                <a:latin typeface="Calibri"/>
+                <a:ea typeface="Calibri"/>
+                <a:cs typeface="Calibri"/>
+                <a:sym typeface="Calibri"/>
+              </a:rPr>
+              <a:t> и другие сервисы. </a:t>
+            </a:r>
+          </a:p>
+          <a:p>
+            <a:r>
+              <a:rPr lang="ru-RU" sz="1200" b="1" i="0" u="none" strike="noStrike" cap="none" dirty="0" smtClean="0">
+                <a:solidFill>
+                  <a:schemeClr val="dk1"/>
+                </a:solidFill>
+                <a:effectLst/>
+                <a:latin typeface="Calibri"/>
+                <a:ea typeface="Calibri"/>
+                <a:cs typeface="Calibri"/>
+                <a:sym typeface="Calibri"/>
+              </a:rPr>
+              <a:t>Минусы Яндекс Музыки:</a:t>
+            </a:r>
+            <a:endParaRPr lang="ru-RU" sz="1200" b="0" i="0" u="none" strike="noStrike" cap="none" dirty="0" smtClean="0">
+              <a:solidFill>
+                <a:schemeClr val="dk1"/>
+              </a:solidFill>
+              <a:effectLst/>
+              <a:latin typeface="Calibri"/>
+              <a:ea typeface="Calibri"/>
+              <a:cs typeface="Calibri"/>
+              <a:sym typeface="Calibri"/>
+            </a:endParaRPr>
+          </a:p>
+          <a:p>
+            <a:pPr lvl="0"/>
+            <a:r>
+              <a:rPr lang="ru-RU" sz="1200" b="0" i="0" u="none" strike="noStrike" cap="none" dirty="0" smtClean="0">
+                <a:solidFill>
+                  <a:schemeClr val="dk1"/>
+                </a:solidFill>
+                <a:effectLst/>
+                <a:latin typeface="Calibri"/>
+                <a:ea typeface="Calibri"/>
+                <a:cs typeface="Calibri"/>
+                <a:sym typeface="Calibri"/>
+              </a:rPr>
+              <a:t>В бесплатной версии есть реклама и ограничения. </a:t>
+            </a:r>
+          </a:p>
+          <a:p>
+            <a:pPr lvl="0"/>
+            <a:r>
+              <a:rPr lang="ru-RU" sz="1200" b="0" i="0" u="none" strike="noStrike" cap="none" dirty="0" smtClean="0">
+                <a:solidFill>
+                  <a:schemeClr val="dk1"/>
+                </a:solidFill>
+                <a:effectLst/>
+                <a:latin typeface="Calibri"/>
+                <a:ea typeface="Calibri"/>
+                <a:cs typeface="Calibri"/>
+                <a:sym typeface="Calibri"/>
+              </a:rPr>
+              <a:t>После 2022 года в сервисе стало меньше зарубежной музыки и некоторых мировых релизов.</a:t>
+            </a:r>
+          </a:p>
+          <a:p>
             <a:pPr marL="0" lvl="0" indent="0" algn="l" rtl="0">
               <a:spcBef>
                 <a:spcPts val="0"/>
@@ -1728,7 +2202,7 @@
               </a:spcAft>
               <a:buNone/>
             </a:pPr>
-            <a:endParaRPr/>
+            <a:endParaRPr dirty="0"/>
           </a:p>
         </p:txBody>
       </p:sp>
@@ -1823,6 +2297,38 @@
           </a:bodyPr>
           <a:lstStyle/>
           <a:p>
+            <a:r>
+              <a:rPr lang="ru-RU" dirty="0" smtClean="0"/>
+              <a:t>После анализа аналогов были сформированы функциональные требования к приложению.</a:t>
+            </a:r>
+          </a:p>
+          <a:p>
+            <a:r>
+              <a:rPr lang="ru-RU" dirty="0" smtClean="0"/>
+              <a:t>Пользователь должен иметь возможность зарегистрироваться и авторизоваться в системе. После входа он получает доступ к каталогу музыки, поиску треков и управлению собственными </a:t>
+            </a:r>
+            <a:r>
+              <a:rPr lang="ru-RU" dirty="0" err="1" smtClean="0"/>
+              <a:t>плейлистами</a:t>
+            </a:r>
+            <a:r>
+              <a:rPr lang="ru-RU" dirty="0" smtClean="0"/>
+              <a:t>.</a:t>
+            </a:r>
+          </a:p>
+          <a:p>
+            <a:r>
+              <a:rPr lang="ru-RU" dirty="0" smtClean="0"/>
+              <a:t>Также приложение должно поддерживать воспроизведение музыки в фоновом режиме, сохранение данных для офлайн-доступа и кэширование информации для повышения производительности.</a:t>
+            </a:r>
+          </a:p>
+          <a:p>
+            <a:r>
+              <a:rPr lang="ru-RU" dirty="0" smtClean="0"/>
+              <a:t>Таким образом, были определены основные функции, которые необходимо реализовать в проекте.</a:t>
+            </a:r>
+          </a:p>
+          <a:p>
             <a:pPr marL="0" lvl="0" indent="0" algn="l" rtl="0">
               <a:spcBef>
                 <a:spcPts val="0"/>
@@ -1832,7 +2338,7 @@
               </a:spcAft>
               <a:buNone/>
             </a:pPr>
-            <a:endParaRPr/>
+            <a:endParaRPr dirty="0"/>
           </a:p>
         </p:txBody>
       </p:sp>
@@ -1927,6 +2433,152 @@
           </a:bodyPr>
           <a:lstStyle/>
           <a:p>
+            <a:r>
+              <a:rPr lang="ru-RU" dirty="0" smtClean="0"/>
+              <a:t>Для разработки серверной части использовались </a:t>
+            </a:r>
+            <a:r>
+              <a:rPr lang="ru-RU" dirty="0" err="1" smtClean="0"/>
+              <a:t>Kotlin</a:t>
+            </a:r>
+            <a:r>
+              <a:rPr lang="ru-RU" dirty="0" smtClean="0"/>
+              <a:t> и </a:t>
+            </a:r>
+            <a:r>
+              <a:rPr lang="ru-RU" dirty="0" err="1" smtClean="0"/>
+              <a:t>фреймворк</a:t>
+            </a:r>
+            <a:r>
+              <a:rPr lang="ru-RU" dirty="0" smtClean="0"/>
+              <a:t> </a:t>
+            </a:r>
+            <a:r>
+              <a:rPr lang="ru-RU" dirty="0" err="1" smtClean="0"/>
+              <a:t>Ktor</a:t>
+            </a:r>
+            <a:r>
+              <a:rPr lang="ru-RU" dirty="0" smtClean="0"/>
+              <a:t>. Для хранения данных была выбрана </a:t>
+            </a:r>
+            <a:r>
+              <a:rPr lang="ru-RU" dirty="0" err="1" smtClean="0"/>
+              <a:t>PostgreSQL</a:t>
+            </a:r>
+            <a:r>
+              <a:rPr lang="ru-RU" dirty="0" smtClean="0"/>
+              <a:t>, а для работы с базой данных использовалась библиотека </a:t>
+            </a:r>
+            <a:r>
+              <a:rPr lang="ru-RU" dirty="0" err="1" smtClean="0"/>
+              <a:t>Exposed</a:t>
+            </a:r>
+            <a:r>
+              <a:rPr lang="ru-RU" dirty="0" smtClean="0"/>
+              <a:t>.</a:t>
+            </a:r>
+          </a:p>
+          <a:p>
+            <a:r>
+              <a:rPr lang="ru-RU" dirty="0" smtClean="0"/>
+              <a:t>Для безопасности были применены JWT-</a:t>
+            </a:r>
+            <a:r>
+              <a:rPr lang="ru-RU" dirty="0" err="1" smtClean="0"/>
+              <a:t>токены</a:t>
+            </a:r>
+            <a:r>
+              <a:rPr lang="ru-RU" dirty="0" smtClean="0"/>
+              <a:t> и </a:t>
+            </a:r>
+            <a:r>
+              <a:rPr lang="ru-RU" dirty="0" err="1" smtClean="0"/>
+              <a:t>BCrypt</a:t>
+            </a:r>
+            <a:r>
+              <a:rPr lang="ru-RU" dirty="0" smtClean="0"/>
+              <a:t> для хранения паролей.</a:t>
+            </a:r>
+          </a:p>
+          <a:p>
+            <a:r>
+              <a:rPr lang="ru-RU" dirty="0" smtClean="0"/>
+              <a:t>Клиентская часть разработана на </a:t>
+            </a:r>
+            <a:r>
+              <a:rPr lang="ru-RU" dirty="0" err="1" smtClean="0"/>
+              <a:t>Kotlin</a:t>
+            </a:r>
+            <a:r>
+              <a:rPr lang="ru-RU" dirty="0" smtClean="0"/>
+              <a:t> с использованием </a:t>
+            </a:r>
+            <a:r>
+              <a:rPr lang="ru-RU" dirty="0" err="1" smtClean="0"/>
+              <a:t>Jetpack</a:t>
+            </a:r>
+            <a:r>
+              <a:rPr lang="ru-RU" dirty="0" smtClean="0"/>
+              <a:t> </a:t>
+            </a:r>
+            <a:r>
+              <a:rPr lang="ru-RU" dirty="0" err="1" smtClean="0"/>
+              <a:t>Compose</a:t>
+            </a:r>
+            <a:r>
+              <a:rPr lang="ru-RU" dirty="0" smtClean="0"/>
+              <a:t> для создания интерфейса.</a:t>
+            </a:r>
+          </a:p>
+          <a:p>
+            <a:r>
+              <a:rPr lang="ru-RU" dirty="0" err="1" smtClean="0"/>
+              <a:t>Room</a:t>
+            </a:r>
+            <a:r>
+              <a:rPr lang="ru-RU" dirty="0" smtClean="0"/>
+              <a:t> используется для локального хранения данных, </a:t>
+            </a:r>
+            <a:r>
+              <a:rPr lang="ru-RU" dirty="0" err="1" smtClean="0"/>
+              <a:t>ExoPlayer</a:t>
+            </a:r>
+            <a:r>
+              <a:rPr lang="ru-RU" dirty="0" smtClean="0"/>
+              <a:t> — для воспроизведения музыки, </a:t>
+            </a:r>
+            <a:r>
+              <a:rPr lang="ru-RU" dirty="0" err="1" smtClean="0"/>
+              <a:t>Hilt</a:t>
+            </a:r>
+            <a:r>
+              <a:rPr lang="ru-RU" dirty="0" smtClean="0"/>
+              <a:t> — для внедрения зависимостей, </a:t>
+            </a:r>
+            <a:r>
+              <a:rPr lang="ru-RU" dirty="0" err="1" smtClean="0"/>
+              <a:t>Coroutines</a:t>
+            </a:r>
+            <a:r>
+              <a:rPr lang="ru-RU" dirty="0" smtClean="0"/>
+              <a:t> — для асинхронных операций.</a:t>
+            </a:r>
+          </a:p>
+          <a:p>
+            <a:r>
+              <a:rPr lang="ru-RU" dirty="0" smtClean="0"/>
+              <a:t>Такой стек технологий является современным и широко используется в </a:t>
+            </a:r>
+            <a:r>
+              <a:rPr lang="ru-RU" dirty="0" err="1" smtClean="0"/>
+              <a:t>Android</a:t>
+            </a:r>
+            <a:r>
+              <a:rPr lang="ru-RU" dirty="0" smtClean="0"/>
+              <a:t>-разработке.</a:t>
+            </a:r>
+          </a:p>
+          <a:p>
             <a:pPr marL="0" lvl="0" indent="0" algn="l" rtl="0">
               <a:spcBef>
                 <a:spcPts val="0"/>
@@ -1936,7 +2588,7 @@
               </a:spcAft>
               <a:buNone/>
             </a:pPr>
-            <a:endParaRPr/>
+            <a:endParaRPr dirty="0"/>
           </a:p>
         </p:txBody>
       </p:sp>
@@ -2031,6 +2683,35 @@
           </a:bodyPr>
           <a:lstStyle/>
           <a:p>
+            <a:pPr marL="0" marR="0" lvl="0" indent="0" algn="l" defTabSz="914400" rtl="0" eaLnBrk="1" fontAlgn="auto" latinLnBrk="0" hangingPunct="1">
+              <a:lnSpc>
+                <a:spcPct val="100000"/>
+              </a:lnSpc>
+              <a:spcBef>
+                <a:spcPts val="0"/>
+              </a:spcBef>
+              <a:spcAft>
+                <a:spcPts val="0"/>
+              </a:spcAft>
+              <a:buClr>
+                <a:srgbClr val="000000"/>
+              </a:buClr>
+              <a:buSzPts val="1400"/>
+              <a:buFont typeface="Arial"/>
+              <a:buNone/>
+              <a:tabLst/>
+              <a:defRPr/>
+            </a:pPr>
+            <a:r>
+              <a:rPr lang="ru-RU" sz="1200" dirty="0" smtClean="0">
+                <a:solidFill>
+                  <a:srgbClr val="00497A"/>
+                </a:solidFill>
+              </a:rPr>
+              <a:t>Такой подход упрощает поддержку проекта, тестирование и дальнейшее расширение функциональности.</a:t>
+            </a:r>
+          </a:p>
+          <a:p>
             <a:pPr marL="0" lvl="0" indent="0" algn="l" rtl="0">
               <a:spcBef>
                 <a:spcPts val="0"/>
@@ -2135,16 +2816,357 @@
           </a:bodyPr>
           <a:lstStyle/>
           <a:p>
-            <a:pPr marL="0" lvl="0" indent="0" algn="l" rtl="0">
-              <a:spcBef>
-                <a:spcPts val="0"/>
-              </a:spcBef>
-              <a:spcAft>
-                <a:spcPts val="0"/>
-              </a:spcAft>
-              <a:buNone/>
-            </a:pPr>
-            <a:endParaRPr/>
+            <a:r>
+              <a:rPr lang="ru-RU" dirty="0" smtClean="0"/>
+              <a:t>Коротко</a:t>
+            </a:r>
+            <a:r>
+              <a:rPr lang="en-US" dirty="0" smtClean="0"/>
+              <a:t>:</a:t>
+            </a:r>
+            <a:r>
+              <a:rPr lang="ru-RU" dirty="0" smtClean="0"/>
+              <a:t/>
+            </a:r>
+            <a:br>
+              <a:rPr lang="ru-RU" dirty="0" smtClean="0"/>
+            </a:br>
+            <a:r>
+              <a:rPr lang="ru-RU" dirty="0" smtClean="0"/>
+              <a:t>На данном слайде представлена структура базы данных приложения.</a:t>
+            </a:r>
+          </a:p>
+          <a:p>
+            <a:r>
+              <a:rPr lang="ru-RU" dirty="0" smtClean="0"/>
+              <a:t>Она состоит из четырёх таблиц: </a:t>
+            </a:r>
+            <a:r>
+              <a:rPr lang="ru-RU" b="1" dirty="0" err="1" smtClean="0"/>
+              <a:t>users</a:t>
+            </a:r>
+            <a:r>
+              <a:rPr lang="ru-RU" dirty="0" smtClean="0"/>
+              <a:t>, </a:t>
+            </a:r>
+            <a:r>
+              <a:rPr lang="ru-RU" b="1" dirty="0" err="1" smtClean="0"/>
+              <a:t>playlists</a:t>
+            </a:r>
+            <a:r>
+              <a:rPr lang="ru-RU" dirty="0" smtClean="0"/>
+              <a:t>, </a:t>
+            </a:r>
+            <a:r>
+              <a:rPr lang="ru-RU" b="1" dirty="0" err="1" smtClean="0"/>
+              <a:t>tracks</a:t>
+            </a:r>
+            <a:r>
+              <a:rPr lang="ru-RU" dirty="0" smtClean="0"/>
+              <a:t> и </a:t>
+            </a:r>
+            <a:r>
+              <a:rPr lang="ru-RU" b="1" dirty="0" err="1" smtClean="0"/>
+              <a:t>playlist_tracks</a:t>
+            </a:r>
+            <a:r>
+              <a:rPr lang="ru-RU" dirty="0" smtClean="0"/>
+              <a:t>.</a:t>
+            </a:r>
+          </a:p>
+          <a:p>
+            <a:r>
+              <a:rPr lang="ru-RU" dirty="0" smtClean="0"/>
+              <a:t>В таблице </a:t>
+            </a:r>
+            <a:r>
+              <a:rPr lang="ru-RU" dirty="0" err="1" smtClean="0"/>
+              <a:t>users</a:t>
+            </a:r>
+            <a:r>
+              <a:rPr lang="ru-RU" dirty="0" smtClean="0"/>
+              <a:t> хранятся данные пользователей, в </a:t>
+            </a:r>
+            <a:r>
+              <a:rPr lang="ru-RU" dirty="0" err="1" smtClean="0"/>
+              <a:t>playlists</a:t>
+            </a:r>
+            <a:r>
+              <a:rPr lang="ru-RU" dirty="0" smtClean="0"/>
+              <a:t> — пользовательские </a:t>
+            </a:r>
+            <a:r>
+              <a:rPr lang="ru-RU" dirty="0" err="1" smtClean="0"/>
+              <a:t>плейлисты</a:t>
+            </a:r>
+            <a:r>
+              <a:rPr lang="ru-RU" dirty="0" smtClean="0"/>
+              <a:t>, а в </a:t>
+            </a:r>
+            <a:r>
+              <a:rPr lang="ru-RU" dirty="0" err="1" smtClean="0"/>
+              <a:t>tracks</a:t>
+            </a:r>
+            <a:r>
+              <a:rPr lang="ru-RU" dirty="0" smtClean="0"/>
+              <a:t> — информация о музыкальных композициях.</a:t>
+            </a:r>
+          </a:p>
+          <a:p>
+            <a:r>
+              <a:rPr lang="ru-RU" dirty="0" smtClean="0"/>
+              <a:t>Для связи треков и </a:t>
+            </a:r>
+            <a:r>
+              <a:rPr lang="ru-RU" dirty="0" err="1" smtClean="0"/>
+              <a:t>плейлистов</a:t>
+            </a:r>
+            <a:r>
+              <a:rPr lang="ru-RU" dirty="0" smtClean="0"/>
+              <a:t> используется таблица </a:t>
+            </a:r>
+            <a:r>
+              <a:rPr lang="ru-RU" dirty="0" err="1" smtClean="0"/>
+              <a:t>playlist_tracks</a:t>
+            </a:r>
+            <a:r>
+              <a:rPr lang="ru-RU" dirty="0" smtClean="0"/>
+              <a:t>, которая реализует связь «многие ко многим». Благодаря этому один трек может находиться в нескольких </a:t>
+            </a:r>
+            <a:r>
+              <a:rPr lang="ru-RU" dirty="0" err="1" smtClean="0"/>
+              <a:t>плейлистах</a:t>
+            </a:r>
+            <a:r>
+              <a:rPr lang="ru-RU" dirty="0" smtClean="0"/>
+              <a:t>, а один </a:t>
+            </a:r>
+            <a:r>
+              <a:rPr lang="ru-RU" dirty="0" err="1" smtClean="0"/>
+              <a:t>плейлист</a:t>
+            </a:r>
+            <a:r>
+              <a:rPr lang="ru-RU" dirty="0" smtClean="0"/>
+              <a:t> может содержать множество треков.</a:t>
+            </a:r>
+          </a:p>
+          <a:p>
+            <a:r>
+              <a:rPr lang="ru-RU" dirty="0" smtClean="0"/>
+              <a:t>Такая структура позволяет удобно хранить данные и эффективно работать с ними в приложении.</a:t>
+            </a:r>
+          </a:p>
+          <a:p>
+            <a:endParaRPr lang="en-US" dirty="0" smtClean="0"/>
+          </a:p>
+          <a:p>
+            <a:endParaRPr lang="en-US" dirty="0" smtClean="0"/>
+          </a:p>
+          <a:p>
+            <a:r>
+              <a:rPr lang="ru-RU" dirty="0" smtClean="0"/>
+              <a:t>Полная</a:t>
+            </a:r>
+            <a:r>
+              <a:rPr lang="en-US" dirty="0" smtClean="0"/>
+              <a:t>:</a:t>
+            </a:r>
+            <a:r>
+              <a:rPr lang="ru-RU" dirty="0" smtClean="0"/>
+              <a:t/>
+            </a:r>
+            <a:br>
+              <a:rPr lang="ru-RU" dirty="0" smtClean="0"/>
+            </a:br>
+            <a:r>
+              <a:rPr lang="ru-RU" dirty="0" smtClean="0"/>
+              <a:t>На данном слайде представлена модель базы данных приложения.</a:t>
+            </a:r>
+          </a:p>
+          <a:p>
+            <a:r>
+              <a:rPr lang="ru-RU" dirty="0" smtClean="0"/>
+              <a:t>В основе системы находятся четыре таблицы: </a:t>
+            </a:r>
+            <a:r>
+              <a:rPr lang="ru-RU" b="1" dirty="0" err="1" smtClean="0"/>
+              <a:t>users</a:t>
+            </a:r>
+            <a:r>
+              <a:rPr lang="ru-RU" dirty="0" smtClean="0"/>
+              <a:t>, </a:t>
+            </a:r>
+            <a:r>
+              <a:rPr lang="ru-RU" b="1" dirty="0" err="1" smtClean="0"/>
+              <a:t>playlists</a:t>
+            </a:r>
+            <a:r>
+              <a:rPr lang="ru-RU" dirty="0" smtClean="0"/>
+              <a:t>, </a:t>
+            </a:r>
+            <a:r>
+              <a:rPr lang="ru-RU" b="1" dirty="0" err="1" smtClean="0"/>
+              <a:t>tracks</a:t>
+            </a:r>
+            <a:r>
+              <a:rPr lang="ru-RU" dirty="0" smtClean="0"/>
+              <a:t> и связующая таблица </a:t>
+            </a:r>
+            <a:r>
+              <a:rPr lang="ru-RU" b="1" dirty="0" err="1" smtClean="0"/>
+              <a:t>playlist_tracks</a:t>
+            </a:r>
+            <a:r>
+              <a:rPr lang="ru-RU" dirty="0" smtClean="0"/>
+              <a:t>.</a:t>
+            </a:r>
+          </a:p>
+          <a:p>
+            <a:r>
+              <a:rPr lang="ru-RU" dirty="0" smtClean="0"/>
+              <a:t>Таблица </a:t>
+            </a:r>
+            <a:r>
+              <a:rPr lang="ru-RU" b="1" dirty="0" err="1" smtClean="0"/>
+              <a:t>users</a:t>
+            </a:r>
+            <a:r>
+              <a:rPr lang="ru-RU" dirty="0" smtClean="0"/>
+              <a:t> хранит информацию о пользователях: логин, электронную почту, </a:t>
+            </a:r>
+            <a:r>
+              <a:rPr lang="ru-RU" dirty="0" err="1" smtClean="0"/>
+              <a:t>хеш</a:t>
+            </a:r>
+            <a:r>
+              <a:rPr lang="ru-RU" dirty="0" smtClean="0"/>
+              <a:t> пароля и дату регистрации.</a:t>
+            </a:r>
+          </a:p>
+          <a:p>
+            <a:r>
+              <a:rPr lang="ru-RU" dirty="0" smtClean="0"/>
+              <a:t>Таблица </a:t>
+            </a:r>
+            <a:r>
+              <a:rPr lang="ru-RU" b="1" dirty="0" err="1" smtClean="0"/>
+              <a:t>playlists</a:t>
+            </a:r>
+            <a:r>
+              <a:rPr lang="ru-RU" dirty="0" smtClean="0"/>
+              <a:t> содержит пользовательские </a:t>
+            </a:r>
+            <a:r>
+              <a:rPr lang="ru-RU" dirty="0" err="1" smtClean="0"/>
+              <a:t>плейлисты</a:t>
+            </a:r>
+            <a:r>
+              <a:rPr lang="ru-RU" dirty="0" smtClean="0"/>
+              <a:t>. Каждый </a:t>
+            </a:r>
+            <a:r>
+              <a:rPr lang="ru-RU" dirty="0" err="1" smtClean="0"/>
+              <a:t>плейлист</a:t>
+            </a:r>
+            <a:r>
+              <a:rPr lang="ru-RU" dirty="0" smtClean="0"/>
+              <a:t> связан с конкретным пользователем через внешний ключ </a:t>
+            </a:r>
+            <a:r>
+              <a:rPr lang="ru-RU" b="1" dirty="0" err="1" smtClean="0"/>
+              <a:t>user_id</a:t>
+            </a:r>
+            <a:r>
+              <a:rPr lang="ru-RU" dirty="0" smtClean="0"/>
+              <a:t>, поэтому один пользователь может создавать неограниченное количество </a:t>
+            </a:r>
+            <a:r>
+              <a:rPr lang="ru-RU" dirty="0" err="1" smtClean="0"/>
+              <a:t>плейлистов</a:t>
+            </a:r>
+            <a:r>
+              <a:rPr lang="ru-RU" dirty="0" smtClean="0"/>
+              <a:t>.</a:t>
+            </a:r>
+          </a:p>
+          <a:p>
+            <a:r>
+              <a:rPr lang="ru-RU" dirty="0" smtClean="0"/>
+              <a:t>Таблица </a:t>
+            </a:r>
+            <a:r>
+              <a:rPr lang="ru-RU" b="1" dirty="0" err="1" smtClean="0"/>
+              <a:t>tracks</a:t>
+            </a:r>
+            <a:r>
+              <a:rPr lang="ru-RU" dirty="0" smtClean="0"/>
+              <a:t> хранит информацию о музыкальных композициях: название трека, исполнителя, длительность, жанр, а также ссылки на обложку и аудиофайл.</a:t>
+            </a:r>
+          </a:p>
+          <a:p>
+            <a:r>
+              <a:rPr lang="ru-RU" dirty="0" smtClean="0"/>
+              <a:t>Поскольку один трек может находиться в нескольких </a:t>
+            </a:r>
+            <a:r>
+              <a:rPr lang="ru-RU" dirty="0" err="1" smtClean="0"/>
+              <a:t>плейлистах</a:t>
+            </a:r>
+            <a:r>
+              <a:rPr lang="ru-RU" dirty="0" smtClean="0"/>
+              <a:t>, а один </a:t>
+            </a:r>
+            <a:r>
+              <a:rPr lang="ru-RU" dirty="0" err="1" smtClean="0"/>
+              <a:t>плейлист</a:t>
+            </a:r>
+            <a:r>
+              <a:rPr lang="ru-RU" dirty="0" smtClean="0"/>
+              <a:t> может содержать множество треков, была реализована связь «многие ко многим». Для этого используется промежуточная таблица </a:t>
+            </a:r>
+            <a:r>
+              <a:rPr lang="ru-RU" b="1" dirty="0" err="1" smtClean="0"/>
+              <a:t>playlist_tracks</a:t>
+            </a:r>
+            <a:r>
+              <a:rPr lang="ru-RU" dirty="0" smtClean="0"/>
+              <a:t>, которая хранит идентификаторы </a:t>
+            </a:r>
+            <a:r>
+              <a:rPr lang="ru-RU" dirty="0" err="1" smtClean="0"/>
+              <a:t>плейлиста</a:t>
+            </a:r>
+            <a:r>
+              <a:rPr lang="ru-RU" dirty="0" smtClean="0"/>
+              <a:t> и трека, а также дату добавления композиции.</a:t>
+            </a:r>
+          </a:p>
+          <a:p>
+            <a:r>
+              <a:rPr lang="ru-RU" dirty="0" smtClean="0"/>
+              <a:t>Такая структура базы данных соответствует принципам нормализации, исключает дублирование информации и обеспечивает быстрый доступ к данным при работе приложения.</a:t>
+            </a:r>
+          </a:p>
+          <a:p>
+            <a:r>
+              <a:rPr lang="ru-RU" b="1" dirty="0" smtClean="0"/>
+              <a:t>Вывод в конце слайда</a:t>
+            </a:r>
+          </a:p>
+          <a:p>
+            <a:r>
+              <a:rPr lang="ru-RU" dirty="0" smtClean="0"/>
+              <a:t>Таким образом, разработанная структура базы данных позволяет эффективно хранить информацию о пользователях, треках и </a:t>
+            </a:r>
+            <a:r>
+              <a:rPr lang="ru-RU" dirty="0" err="1" smtClean="0"/>
+              <a:t>плейлистах</a:t>
+            </a:r>
+            <a:r>
+              <a:rPr lang="ru-RU" dirty="0" smtClean="0"/>
+              <a:t>, а также обеспечивает удобное масштабирование приложения при дальнейшем развитии проекта.</a:t>
+            </a:r>
+            <a:endParaRPr lang="ru-RU" dirty="0"/>
           </a:p>
         </p:txBody>
       </p:sp>
@@ -2239,6 +3261,54 @@
           </a:bodyPr>
           <a:lstStyle/>
           <a:p>
+            <a:r>
+              <a:rPr lang="ru-RU" dirty="0" smtClean="0"/>
+              <a:t>На данном слайде представлены основные экраны разработанного приложения.</a:t>
+            </a:r>
+          </a:p>
+          <a:p>
+            <a:r>
+              <a:rPr lang="ru-RU" dirty="0" smtClean="0"/>
+              <a:t>Реализованы экраны авторизации и регистрации, каталог музыкальных треков, поиск, управление </a:t>
+            </a:r>
+            <a:r>
+              <a:rPr lang="ru-RU" dirty="0" err="1" smtClean="0"/>
+              <a:t>плейлистами</a:t>
+            </a:r>
+            <a:r>
+              <a:rPr lang="ru-RU" dirty="0" smtClean="0"/>
+              <a:t> и музыкальный плеер.</a:t>
+            </a:r>
+          </a:p>
+          <a:p>
+            <a:r>
+              <a:rPr lang="ru-RU" dirty="0" smtClean="0"/>
+              <a:t>Интерфейс разработан в современном стиле с использованием </a:t>
+            </a:r>
+            <a:r>
+              <a:rPr lang="ru-RU" dirty="0" err="1" smtClean="0"/>
+              <a:t>Jetpack</a:t>
+            </a:r>
+            <a:r>
+              <a:rPr lang="ru-RU" dirty="0" smtClean="0"/>
+              <a:t> </a:t>
+            </a:r>
+            <a:r>
+              <a:rPr lang="ru-RU" dirty="0" err="1" smtClean="0"/>
+              <a:t>Compose</a:t>
+            </a:r>
+            <a:r>
+              <a:rPr lang="ru-RU" dirty="0" smtClean="0"/>
+              <a:t>.</a:t>
+            </a:r>
+          </a:p>
+          <a:p>
+            <a:r>
+              <a:rPr lang="ru-RU" dirty="0" smtClean="0"/>
+              <a:t>Особое внимание было уделено удобству использования и минимальному количеству действий для доступа к музыке.</a:t>
+            </a:r>
+          </a:p>
+          <a:p>
             <a:pPr marL="0" lvl="0" indent="0" algn="l" rtl="0">
               <a:spcBef>
                 <a:spcPts val="0"/>
@@ -2248,7 +3318,7 @@
               </a:spcAft>
               <a:buNone/>
             </a:pPr>
-            <a:endParaRPr/>
+            <a:endParaRPr dirty="0"/>
           </a:p>
         </p:txBody>
       </p:sp>
@@ -2352,7 +3422,7 @@
               </a:spcAft>
               <a:buNone/>
             </a:pPr>
-            <a:endParaRPr/>
+            <a:endParaRPr dirty="0"/>
           </a:p>
         </p:txBody>
       </p:sp>
@@ -7935,8 +9005,8 @@
         </p:nvSpPr>
         <p:spPr>
           <a:xfrm>
-            <a:off x="1283516" y="1384183"/>
-            <a:ext cx="9949343" cy="1754286"/>
+            <a:off x="838199" y="1219200"/>
+            <a:ext cx="10515601" cy="4565825"/>
           </a:xfrm>
           <a:prstGeom prst="rect">
             <a:avLst/>
@@ -7952,209 +9022,532 @@
           </a:bodyPr>
           <a:lstStyle/>
           <a:p>
-            <a:pPr algn="just"/>
-            <a:r>
-              <a:rPr lang="ru-RU" sz="1800" dirty="0" smtClean="0">
+            <a:pPr algn="just">
+              <a:lnSpc>
+                <a:spcPct val="90000"/>
+              </a:lnSpc>
+              <a:buClr>
+                <a:srgbClr val="00497A"/>
+              </a:buClr>
+              <a:buSzPct val="100000"/>
+            </a:pPr>
+            <a:r>
+              <a:rPr lang="ru-RU" sz="1700" dirty="0">
                 <a:solidFill>
                   <a:srgbClr val="00497A"/>
                 </a:solidFill>
               </a:rPr>
-              <a:t>Музыка </a:t>
-            </a:r>
-            <a:r>
-              <a:rPr lang="ru-RU" sz="1800" dirty="0">
+              <a:t>Музыка сопровождает человека повсюду — в дороге, на учёбе, во время отдыха. По данным Международной федерации фонографической индустрии (IFPI), в 2024 году мировой рынок </a:t>
+            </a:r>
+            <a:r>
+              <a:rPr lang="ru-RU" sz="1700" dirty="0" err="1">
                 <a:solidFill>
                   <a:srgbClr val="00497A"/>
                 </a:solidFill>
               </a:rPr>
-              <a:t>сопровождает человека повсюду — в дороге, на учёбе, во время отдыха. По данным Международной федерации фонографической индустрии (IFPI), в 2024 году мировой рынок </a:t>
-            </a:r>
-            <a:r>
-              <a:rPr lang="ru-RU" sz="1800" dirty="0" err="1">
+              <a:t>стриминговой</a:t>
+            </a:r>
+            <a:r>
+              <a:rPr lang="ru-RU" sz="1700" dirty="0">
                 <a:solidFill>
                   <a:srgbClr val="00497A"/>
                 </a:solidFill>
               </a:rPr>
-              <a:t>стриминговой</a:t>
-            </a:r>
-            <a:r>
-              <a:rPr lang="ru-RU" sz="1800" dirty="0">
+              <a:t> музыки вырос на 4,8%</a:t>
+            </a:r>
+            <a:r>
+              <a:rPr lang="en-US" sz="1700" dirty="0">
                 <a:solidFill>
                   <a:srgbClr val="00497A"/>
                 </a:solidFill>
-              </a:rPr>
-              <a:t> музыки вырос на 10,8 %, а количество активных подписчиков музыкальных сервисов достигло 700 миллионов человек. При этом, согласно отчёту </a:t>
-            </a:r>
-            <a:r>
-              <a:rPr lang="ru-RU" sz="1800" dirty="0" err="1">
+                <a:hlinkClick r:id="rId3"/>
+              </a:rPr>
+              <a:t>[</a:t>
+            </a:r>
+            <a:r>
+              <a:rPr lang="af-ZA" sz="1700" dirty="0">
                 <a:solidFill>
                   <a:srgbClr val="00497A"/>
                 </a:solidFill>
+                <a:hlinkClick r:id="rId3"/>
+              </a:rPr>
+              <a:t>IFPI</a:t>
+            </a:r>
+            <a:r>
+              <a:rPr lang="en-US" sz="1700" dirty="0">
+                <a:solidFill>
+                  <a:srgbClr val="00497A"/>
+                </a:solidFill>
+                <a:hlinkClick r:id="rId3"/>
+              </a:rPr>
+              <a:t>]</a:t>
+            </a:r>
+            <a:r>
+              <a:rPr lang="ru-RU" sz="1700" dirty="0">
+                <a:solidFill>
+                  <a:srgbClr val="00497A"/>
+                </a:solidFill>
+              </a:rPr>
+              <a:t>, а количество активных подписчиков музыкальных сервисов достигло 752 миллионов человек </a:t>
+            </a:r>
+            <a:r>
+              <a:rPr lang="en-US" sz="1700" dirty="0">
+                <a:solidFill>
+                  <a:srgbClr val="00497A"/>
+                </a:solidFill>
+                <a:hlinkClick r:id="rId4"/>
+              </a:rPr>
+              <a:t>[</a:t>
+            </a:r>
+            <a:r>
+              <a:rPr lang="af-ZA" sz="1700" dirty="0">
+                <a:solidFill>
+                  <a:srgbClr val="00497A"/>
+                </a:solidFill>
+                <a:hlinkClick r:id="rId4"/>
+              </a:rPr>
+              <a:t>IFPI</a:t>
+            </a:r>
+            <a:r>
+              <a:rPr lang="en-US" sz="1700" dirty="0">
+                <a:solidFill>
+                  <a:srgbClr val="00497A"/>
+                </a:solidFill>
+                <a:hlinkClick r:id="rId4"/>
+              </a:rPr>
+              <a:t>]</a:t>
+            </a:r>
+            <a:r>
+              <a:rPr lang="ru-RU" sz="1700" dirty="0">
+                <a:solidFill>
+                  <a:srgbClr val="00497A"/>
+                </a:solidFill>
+              </a:rPr>
+              <a:t>. При этом, согласно отчёту </a:t>
+            </a:r>
+            <a:r>
+              <a:rPr lang="ru-RU" sz="1700" dirty="0" err="1">
+                <a:solidFill>
+                  <a:srgbClr val="00497A"/>
+                </a:solidFill>
               </a:rPr>
               <a:t>Statista</a:t>
             </a:r>
             <a:r>
-              <a:rPr lang="ru-RU" sz="1800" dirty="0">
+              <a:rPr lang="ru-RU" sz="1700" dirty="0">
                 <a:solidFill>
                   <a:srgbClr val="00497A"/>
                 </a:solidFill>
               </a:rPr>
-              <a:t>, в 2025 году среднестатистический пользователь тратит на прослушивание музыки более 20 часов в неделю.</a:t>
-            </a:r>
-          </a:p>
-        </p:txBody>
-      </p:sp>
-      <p:sp>
-        <p:nvSpPr>
-          <p:cNvPr id="75" name="Google Shape;75;p2"/>
-          <p:cNvSpPr txBox="1"/>
-          <p:nvPr/>
-        </p:nvSpPr>
-        <p:spPr>
-          <a:xfrm>
-            <a:off x="1350628" y="3459810"/>
-            <a:ext cx="10003172" cy="923289"/>
-          </a:xfrm>
-          <a:prstGeom prst="rect">
-            <a:avLst/>
-          </a:prstGeom>
-          <a:noFill/>
-          <a:ln>
-            <a:noFill/>
-          </a:ln>
-        </p:spPr>
-        <p:txBody>
-          <a:bodyPr spcFirstLastPara="1" wrap="square" lIns="91425" tIns="45700" rIns="91425" bIns="45700" anchor="t" anchorCtr="0">
-            <a:spAutoFit/>
-          </a:bodyPr>
-          <a:lstStyle/>
-          <a:p>
-            <a:pPr algn="just"/>
-            <a:r>
-              <a:rPr lang="ru-RU" sz="1800" dirty="0">
+              <a:t>, в 2025 году среднестатистический пользователь тратит на прослушивание музыки более 20 часов в неделю</a:t>
+            </a:r>
+            <a:r>
+              <a:rPr lang="en-US" sz="1700" dirty="0">
                 <a:solidFill>
                   <a:srgbClr val="00497A"/>
                 </a:solidFill>
               </a:rPr>
-              <a:t>Разработка бесплатного клиент-серверного </a:t>
-            </a:r>
-            <a:r>
-              <a:rPr lang="ru-RU" sz="1800" dirty="0" err="1">
+              <a:t> </a:t>
+            </a:r>
+            <a:r>
+              <a:rPr lang="en-US" sz="1700" dirty="0">
                 <a:solidFill>
                   <a:srgbClr val="00497A"/>
                 </a:solidFill>
-              </a:rPr>
-              <a:t>Android</a:t>
-            </a:r>
-            <a:r>
-              <a:rPr lang="ru-RU" sz="1800" dirty="0">
+                <a:hlinkClick r:id="rId5"/>
+              </a:rPr>
+              <a:t>[</a:t>
+            </a:r>
+            <a:r>
+              <a:rPr lang="af-ZA" sz="1700" dirty="0">
                 <a:solidFill>
                   <a:srgbClr val="00497A"/>
                 </a:solidFill>
-              </a:rPr>
-              <a:t>-приложения «</a:t>
-            </a:r>
-            <a:r>
-              <a:rPr lang="ru-RU" sz="1800" dirty="0" err="1">
+                <a:hlinkClick r:id="rId5"/>
+              </a:rPr>
+              <a:t>Statista</a:t>
+            </a:r>
+            <a:r>
+              <a:rPr lang="en-US" sz="1700" dirty="0" smtClean="0">
                 <a:solidFill>
                   <a:srgbClr val="00497A"/>
                 </a:solidFill>
-              </a:rPr>
-              <a:t>MuseFlow</a:t>
-            </a:r>
-            <a:r>
-              <a:rPr lang="ru-RU" sz="1800" dirty="0">
+                <a:hlinkClick r:id="rId5"/>
+              </a:rPr>
+              <a:t>]</a:t>
+            </a:r>
+            <a:r>
+              <a:rPr lang="en-US" sz="1700" dirty="0" smtClean="0">
                 <a:solidFill>
                   <a:srgbClr val="00497A"/>
                 </a:solidFill>
               </a:rPr>
-              <a:t>» для прослушивания музыки, управления </a:t>
-            </a:r>
-            <a:r>
-              <a:rPr lang="ru-RU" sz="1800" dirty="0" err="1">
-                <a:solidFill>
-                  <a:srgbClr val="00497A"/>
-                </a:solidFill>
-              </a:rPr>
-              <a:t>плейлистами</a:t>
-            </a:r>
-            <a:r>
-              <a:rPr lang="ru-RU" sz="1800" dirty="0">
-                <a:solidFill>
-                  <a:srgbClr val="00497A"/>
-                </a:solidFill>
-              </a:rPr>
-              <a:t> и офлайн-доступа к трекам с использованием современного стека технологий (</a:t>
-            </a:r>
-            <a:r>
-              <a:rPr lang="ru-RU" sz="1800" dirty="0" err="1">
-                <a:solidFill>
-                  <a:srgbClr val="00497A"/>
-                </a:solidFill>
-              </a:rPr>
-              <a:t>Kotlin</a:t>
-            </a:r>
-            <a:r>
-              <a:rPr lang="ru-RU" sz="1800" dirty="0">
-                <a:solidFill>
-                  <a:srgbClr val="00497A"/>
-                </a:solidFill>
-              </a:rPr>
-              <a:t>, </a:t>
-            </a:r>
-            <a:r>
-              <a:rPr lang="ru-RU" sz="1800" dirty="0" err="1">
-                <a:solidFill>
-                  <a:srgbClr val="00497A"/>
-                </a:solidFill>
-              </a:rPr>
-              <a:t>Compose</a:t>
-            </a:r>
-            <a:r>
-              <a:rPr lang="ru-RU" sz="1800" dirty="0">
-                <a:solidFill>
-                  <a:srgbClr val="00497A"/>
-                </a:solidFill>
-              </a:rPr>
-              <a:t>, </a:t>
-            </a:r>
-            <a:r>
-              <a:rPr lang="ru-RU" sz="1800" dirty="0" err="1">
-                <a:solidFill>
-                  <a:srgbClr val="00497A"/>
-                </a:solidFill>
-              </a:rPr>
-              <a:t>Ktor</a:t>
-            </a:r>
-            <a:r>
-              <a:rPr lang="ru-RU" sz="1800" dirty="0">
-                <a:solidFill>
-                  <a:srgbClr val="00497A"/>
-                </a:solidFill>
-              </a:rPr>
-              <a:t>, </a:t>
-            </a:r>
-            <a:r>
-              <a:rPr lang="ru-RU" sz="1800" dirty="0" err="1">
-                <a:solidFill>
-                  <a:srgbClr val="00497A"/>
-                </a:solidFill>
-              </a:rPr>
-              <a:t>PostgreSQL</a:t>
-            </a:r>
-            <a:r>
-              <a:rPr lang="ru-RU" sz="1800" dirty="0">
-                <a:solidFill>
-                  <a:srgbClr val="00497A"/>
-                </a:solidFill>
-              </a:rPr>
-              <a:t>).</a:t>
-            </a:r>
-            <a:endParaRPr sz="1800" dirty="0">
+              <a:t>.</a:t>
+            </a:r>
+            <a:endParaRPr lang="ru-RU" sz="1700" dirty="0">
               <a:solidFill>
                 <a:srgbClr val="00497A"/>
               </a:solidFill>
             </a:endParaRPr>
+          </a:p>
+          <a:p>
+            <a:pPr algn="just">
+              <a:lnSpc>
+                <a:spcPct val="90000"/>
+              </a:lnSpc>
+              <a:buClr>
+                <a:srgbClr val="00497A"/>
+              </a:buClr>
+              <a:buSzPct val="100000"/>
+            </a:pPr>
+            <a:endParaRPr lang="ru-RU" sz="1700" dirty="0">
+              <a:solidFill>
+                <a:srgbClr val="00497A"/>
+              </a:solidFill>
+            </a:endParaRPr>
+          </a:p>
+          <a:p>
+            <a:pPr algn="just">
+              <a:lnSpc>
+                <a:spcPct val="90000"/>
+              </a:lnSpc>
+              <a:buClr>
+                <a:srgbClr val="00497A"/>
+              </a:buClr>
+              <a:buSzPct val="100000"/>
+            </a:pPr>
+            <a:r>
+              <a:rPr lang="ru-RU" sz="1700" dirty="0">
+                <a:solidFill>
+                  <a:srgbClr val="00497A"/>
+                </a:solidFill>
+              </a:rPr>
+              <a:t>Сегодня люди не просто слушают музыку — они собирают её по крупицам. Создают </a:t>
+            </a:r>
+            <a:r>
+              <a:rPr lang="ru-RU" sz="1700" dirty="0" err="1">
+                <a:solidFill>
+                  <a:srgbClr val="00497A"/>
+                </a:solidFill>
+              </a:rPr>
+              <a:t>плейлисты</a:t>
+            </a:r>
+            <a:r>
+              <a:rPr lang="ru-RU" sz="1700" dirty="0">
+                <a:solidFill>
+                  <a:srgbClr val="00497A"/>
+                </a:solidFill>
+              </a:rPr>
+              <a:t> под настроение, ищут новые треки в любимых жанрах, включают музыку в метро и на даче — даже когда интернет едва ловит. А ещё хотят переключать песни, не выходя из игры или карт.</a:t>
+            </a:r>
+          </a:p>
+          <a:p>
+            <a:pPr algn="just">
+              <a:lnSpc>
+                <a:spcPct val="90000"/>
+              </a:lnSpc>
+              <a:buClr>
+                <a:srgbClr val="00497A"/>
+              </a:buClr>
+              <a:buSzPct val="100000"/>
+            </a:pPr>
+            <a:r>
+              <a:rPr lang="en-US" sz="1700" dirty="0">
+                <a:solidFill>
+                  <a:srgbClr val="00497A"/>
+                </a:solidFill>
+              </a:rPr>
+              <a:t> </a:t>
+            </a:r>
+            <a:endParaRPr lang="ru-RU" sz="1700" dirty="0">
+              <a:solidFill>
+                <a:srgbClr val="00497A"/>
+              </a:solidFill>
+            </a:endParaRPr>
+          </a:p>
+          <a:p>
+            <a:pPr algn="just">
+              <a:lnSpc>
+                <a:spcPct val="90000"/>
+              </a:lnSpc>
+              <a:buClr>
+                <a:srgbClr val="00497A"/>
+              </a:buClr>
+              <a:buSzPct val="100000"/>
+            </a:pPr>
+            <a:r>
+              <a:rPr lang="ru-RU" sz="1700" dirty="0">
+                <a:solidFill>
+                  <a:srgbClr val="00497A"/>
+                </a:solidFill>
+              </a:rPr>
+              <a:t>Именно поэтому была поставлена цель: разработать бесплатное клиент-серверное </a:t>
+            </a:r>
+            <a:r>
+              <a:rPr lang="ru-RU" sz="1700" dirty="0" err="1">
+                <a:solidFill>
+                  <a:srgbClr val="00497A"/>
+                </a:solidFill>
+              </a:rPr>
+              <a:t>Android</a:t>
+            </a:r>
+            <a:r>
+              <a:rPr lang="ru-RU" sz="1700" dirty="0">
+                <a:solidFill>
+                  <a:srgbClr val="00497A"/>
+                </a:solidFill>
+              </a:rPr>
+              <a:t>-приложение «</a:t>
+            </a:r>
+            <a:r>
+              <a:rPr lang="ru-RU" sz="1700" dirty="0" err="1">
+                <a:solidFill>
+                  <a:srgbClr val="00497A"/>
+                </a:solidFill>
+              </a:rPr>
+              <a:t>MuseFlow</a:t>
+            </a:r>
+            <a:r>
+              <a:rPr lang="ru-RU" sz="1700" dirty="0">
+                <a:solidFill>
+                  <a:srgbClr val="00497A"/>
+                </a:solidFill>
+              </a:rPr>
+              <a:t>», позволяющее слушать музыку, создавать </a:t>
+            </a:r>
+            <a:r>
+              <a:rPr lang="ru-RU" sz="1700" dirty="0" err="1">
+                <a:solidFill>
+                  <a:srgbClr val="00497A"/>
+                </a:solidFill>
+              </a:rPr>
+              <a:t>плейлисты</a:t>
+            </a:r>
+            <a:r>
+              <a:rPr lang="ru-RU" sz="1700" dirty="0">
+                <a:solidFill>
+                  <a:srgbClr val="00497A"/>
+                </a:solidFill>
+              </a:rPr>
+              <a:t>, искать треки по жанрам </a:t>
+            </a:r>
+            <a:r>
+              <a:rPr lang="ru-RU" sz="1700" dirty="0" smtClean="0">
+                <a:solidFill>
+                  <a:srgbClr val="00497A"/>
+                </a:solidFill>
+              </a:rPr>
+              <a:t>с </a:t>
+            </a:r>
+            <a:r>
+              <a:rPr lang="ru-RU" sz="1700" dirty="0">
+                <a:solidFill>
+                  <a:srgbClr val="00497A"/>
+                </a:solidFill>
+              </a:rPr>
+              <a:t>использованием современного стека технологий (</a:t>
+            </a:r>
+            <a:r>
+              <a:rPr lang="ru-RU" sz="1700" dirty="0" err="1">
+                <a:solidFill>
+                  <a:srgbClr val="00497A"/>
+                </a:solidFill>
+              </a:rPr>
+              <a:t>Kotlin</a:t>
+            </a:r>
+            <a:r>
+              <a:rPr lang="ru-RU" sz="1700" dirty="0">
+                <a:solidFill>
+                  <a:srgbClr val="00497A"/>
+                </a:solidFill>
+              </a:rPr>
+              <a:t>, </a:t>
+            </a:r>
+            <a:r>
+              <a:rPr lang="ru-RU" sz="1700" dirty="0" err="1">
+                <a:solidFill>
+                  <a:srgbClr val="00497A"/>
+                </a:solidFill>
+              </a:rPr>
+              <a:t>Compose</a:t>
+            </a:r>
+            <a:r>
+              <a:rPr lang="ru-RU" sz="1700" dirty="0">
+                <a:solidFill>
+                  <a:srgbClr val="00497A"/>
+                </a:solidFill>
+              </a:rPr>
+              <a:t>, </a:t>
+            </a:r>
+            <a:r>
+              <a:rPr lang="ru-RU" sz="1700" dirty="0" err="1">
+                <a:solidFill>
+                  <a:srgbClr val="00497A"/>
+                </a:solidFill>
+              </a:rPr>
+              <a:t>Ktor</a:t>
+            </a:r>
+            <a:r>
+              <a:rPr lang="ru-RU" sz="1700" dirty="0">
+                <a:solidFill>
+                  <a:srgbClr val="00497A"/>
+                </a:solidFill>
+              </a:rPr>
+              <a:t>, </a:t>
+            </a:r>
+            <a:r>
+              <a:rPr lang="ru-RU" sz="1700" dirty="0" err="1">
+                <a:solidFill>
+                  <a:srgbClr val="00497A"/>
+                </a:solidFill>
+              </a:rPr>
+              <a:t>PostgreSQL</a:t>
+            </a:r>
+            <a:r>
+              <a:rPr lang="ru-RU" sz="1700" dirty="0" smtClean="0">
+                <a:solidFill>
+                  <a:srgbClr val="00497A"/>
+                </a:solidFill>
+              </a:rPr>
+              <a:t>).</a:t>
+            </a:r>
+            <a:endParaRPr lang="en-US" sz="1700" dirty="0" smtClean="0">
+              <a:solidFill>
+                <a:srgbClr val="00497A"/>
+              </a:solidFill>
+            </a:endParaRPr>
+          </a:p>
+          <a:p>
+            <a:pPr algn="just">
+              <a:lnSpc>
+                <a:spcPct val="90000"/>
+              </a:lnSpc>
+              <a:buClr>
+                <a:srgbClr val="00497A"/>
+              </a:buClr>
+              <a:buSzPct val="100000"/>
+            </a:pPr>
+            <a:endParaRPr lang="ru-RU" sz="1700" dirty="0">
+              <a:solidFill>
+                <a:srgbClr val="00497A"/>
+              </a:solidFill>
+            </a:endParaRPr>
+          </a:p>
+          <a:p>
+            <a:pPr algn="just">
+              <a:lnSpc>
+                <a:spcPct val="90000"/>
+              </a:lnSpc>
+              <a:buClr>
+                <a:srgbClr val="00497A"/>
+              </a:buClr>
+              <a:buSzPct val="100000"/>
+            </a:pPr>
+            <a:r>
+              <a:rPr lang="ru-RU" sz="1700" dirty="0">
+                <a:solidFill>
+                  <a:srgbClr val="00497A"/>
+                </a:solidFill>
+              </a:rPr>
+              <a:t>Особенности приложения:</a:t>
+            </a:r>
+          </a:p>
+          <a:p>
+            <a:pPr algn="just">
+              <a:lnSpc>
+                <a:spcPct val="90000"/>
+              </a:lnSpc>
+              <a:buClr>
+                <a:srgbClr val="00497A"/>
+              </a:buClr>
+              <a:buSzPct val="100000"/>
+            </a:pPr>
+            <a:r>
+              <a:rPr lang="ru-RU" sz="1700" dirty="0" smtClean="0">
+                <a:solidFill>
+                  <a:srgbClr val="00497A"/>
+                </a:solidFill>
+              </a:rPr>
+              <a:t>Сохранность </a:t>
+            </a:r>
+            <a:r>
+              <a:rPr lang="ru-RU" sz="1700" dirty="0">
+                <a:solidFill>
+                  <a:srgbClr val="00497A"/>
+                </a:solidFill>
+              </a:rPr>
+              <a:t>данных: кэширование списка треков для работы в условиях нестабильного интернета.</a:t>
+            </a:r>
+          </a:p>
+          <a:p>
+            <a:pPr algn="just">
+              <a:lnSpc>
+                <a:spcPct val="90000"/>
+              </a:lnSpc>
+              <a:buClr>
+                <a:srgbClr val="00497A"/>
+              </a:buClr>
+              <a:buSzPct val="100000"/>
+            </a:pPr>
+            <a:r>
+              <a:rPr lang="ru-RU" sz="1700" dirty="0" smtClean="0">
+                <a:solidFill>
+                  <a:srgbClr val="00497A"/>
+                </a:solidFill>
+              </a:rPr>
+              <a:t>Многозадачность</a:t>
+            </a:r>
+            <a:r>
+              <a:rPr lang="ru-RU" sz="1700" dirty="0">
+                <a:solidFill>
+                  <a:srgbClr val="00497A"/>
+                </a:solidFill>
+              </a:rPr>
+              <a:t>: фоновое воспроизведение и управление через системную шторку уведомлений.</a:t>
+            </a:r>
+          </a:p>
+          <a:p>
+            <a:pPr algn="just">
+              <a:lnSpc>
+                <a:spcPct val="90000"/>
+              </a:lnSpc>
+              <a:buClr>
+                <a:srgbClr val="00497A"/>
+              </a:buClr>
+              <a:buSzPct val="100000"/>
+            </a:pPr>
+            <a:r>
+              <a:rPr lang="ru-RU" sz="1700" dirty="0" smtClean="0">
+                <a:solidFill>
+                  <a:srgbClr val="00497A"/>
+                </a:solidFill>
+              </a:rPr>
+              <a:t>Персонализация</a:t>
+            </a:r>
+            <a:r>
+              <a:rPr lang="ru-RU" sz="1700" dirty="0">
+                <a:solidFill>
+                  <a:srgbClr val="00497A"/>
+                </a:solidFill>
+              </a:rPr>
+              <a:t>: система авторизации и управление личными </a:t>
+            </a:r>
+            <a:r>
+              <a:rPr lang="ru-RU" sz="1700" dirty="0" err="1">
+                <a:solidFill>
+                  <a:srgbClr val="00497A"/>
+                </a:solidFill>
+              </a:rPr>
+              <a:t>плейлистами</a:t>
+            </a:r>
+            <a:r>
+              <a:rPr lang="ru-RU" sz="1700" dirty="0">
+                <a:solidFill>
+                  <a:srgbClr val="00497A"/>
+                </a:solidFill>
+              </a:rPr>
+              <a:t>.</a:t>
+            </a:r>
           </a:p>
         </p:txBody>
       </p:sp>
@@ -10774,7 +12167,7 @@
           </a:bodyPr>
           <a:lstStyle/>
           <a:p>
-            <a:pPr marL="0" lvl="0" indent="0" algn="l" rtl="0">
+            <a:pPr marL="0" lvl="0" indent="0" rtl="0">
               <a:lnSpc>
                 <a:spcPct val="90000"/>
               </a:lnSpc>
@@ -11217,8 +12610,21 @@
                   <a:srgbClr val="00497A"/>
                 </a:solidFill>
               </a:rPr>
-              <a:t>Room + Retrofit + GSON</a:t>
-            </a:r>
+              <a:t>Room + </a:t>
+            </a:r>
+            <a:r>
+              <a:rPr lang="af-ZA" sz="1800" dirty="0" smtClean="0">
+                <a:solidFill>
+                  <a:srgbClr val="00497A"/>
+                </a:solidFill>
+              </a:rPr>
+              <a:t>Ktor </a:t>
+            </a:r>
+            <a:endParaRPr lang="ru-RU" sz="1800" dirty="0" smtClean="0">
+              <a:solidFill>
+                <a:srgbClr val="00497A"/>
+              </a:solidFill>
+            </a:endParaRPr>
           </a:p>
           <a:p>
             <a:pPr marL="285750" indent="-285750">
@@ -11230,12 +12636,20 @@
               <a:buChar char="•"/>
             </a:pPr>
             <a:r>
+              <a:rPr lang="af-ZA" sz="1800" dirty="0" smtClean="0">
+                <a:solidFill>
+                  <a:srgbClr val="00497A"/>
+                </a:solidFill>
+              </a:rPr>
+              <a:t>Hilt </a:t>
+            </a:r>
+            <a:r>
               <a:rPr lang="af-ZA" sz="1800" dirty="0">
                 <a:solidFill>
                   <a:srgbClr val="00497A"/>
                 </a:solidFill>
               </a:rPr>
-              <a:t>Hilt + Coroutines + SharedPreferences</a:t>
+              <a:t>+ Coroutines + SharedPreferences</a:t>
             </a:r>
           </a:p>
           <a:p>
@@ -11612,8 +13026,8 @@
         </p:nvSpPr>
         <p:spPr>
           <a:xfrm>
-            <a:off x="1013690" y="1979289"/>
-            <a:ext cx="3752400" cy="1962600"/>
+            <a:off x="600076" y="1979289"/>
+            <a:ext cx="4533900" cy="3217764"/>
           </a:xfrm>
           <a:prstGeom prst="rect">
             <a:avLst/>
@@ -11629,16 +13043,13 @@
           </a:bodyPr>
           <a:lstStyle/>
           <a:p>
-            <a:pPr marL="285750" marR="0" lvl="0" indent="-285750" algn="l" rtl="0">
+            <a:pPr marL="457200" lvl="0" indent="-342900">
               <a:lnSpc>
-                <a:spcPct val="115000"/>
+                <a:spcPct val="90000"/>
               </a:lnSpc>
               <a:spcBef>
-                <a:spcPts val="0"/>
-              </a:spcBef>
-              <a:spcAft>
-                <a:spcPts val="0"/>
-              </a:spcAft>
+                <a:spcPts val="1000"/>
+              </a:spcBef>
               <a:buClr>
                 <a:srgbClr val="00497A"/>
               </a:buClr>
@@ -11647,38 +13058,62 @@
               <a:buChar char="•"/>
             </a:pPr>
             <a:r>
+              <a:rPr lang="ru-RU" sz="1800" dirty="0">
+                <a:solidFill>
+                  <a:srgbClr val="00497A"/>
+                </a:solidFill>
+              </a:rPr>
+              <a:t>Архитектура </a:t>
+            </a:r>
+            <a:r>
+              <a:rPr lang="ru-RU" sz="1800" dirty="0">
+                <a:solidFill>
+                  <a:srgbClr val="00497A"/>
+                </a:solidFill>
+              </a:rPr>
+              <a:t>приложения построена по принципам </a:t>
+            </a:r>
+            <a:r>
               <a:rPr lang="ru-RU" sz="1800" dirty="0" err="1">
                 <a:solidFill>
                   <a:srgbClr val="00497A"/>
                 </a:solidFill>
-                <a:latin typeface="Arial"/>
-                <a:ea typeface="Arial"/>
-                <a:cs typeface="Arial"/>
-                <a:sym typeface="Arial"/>
-              </a:rPr>
-              <a:t>Многомодульность</a:t>
-            </a:r>
-            <a:endParaRPr sz="1800" dirty="0">
-              <a:solidFill>
-                <a:srgbClr val="00497A"/>
-              </a:solidFill>
-              <a:latin typeface="Arial"/>
-              <a:ea typeface="Arial"/>
-              <a:cs typeface="Arial"/>
-              <a:sym typeface="Arial"/>
-            </a:endParaRPr>
-          </a:p>
-          <a:p>
-            <a:pPr marL="285750" marR="0" lvl="0" indent="-285750" algn="l" rtl="0">
+              </a:rPr>
+              <a:t>Clean</a:t>
+            </a:r>
+            <a:r>
+              <a:rPr lang="ru-RU" sz="1800" dirty="0">
+                <a:solidFill>
+                  <a:srgbClr val="00497A"/>
+                </a:solidFill>
+              </a:rPr>
+              <a:t> </a:t>
+            </a:r>
+            <a:r>
+              <a:rPr lang="ru-RU" sz="1800" dirty="0" err="1">
+                <a:solidFill>
+                  <a:srgbClr val="00497A"/>
+                </a:solidFill>
+              </a:rPr>
+              <a:t>Architecture</a:t>
+            </a:r>
+            <a:r>
+              <a:rPr lang="ru-RU" sz="1800" dirty="0">
+                <a:solidFill>
+                  <a:srgbClr val="00497A"/>
+                </a:solidFill>
+              </a:rPr>
+              <a:t>.</a:t>
+            </a:r>
+          </a:p>
+          <a:p>
+            <a:pPr marL="457200" indent="-342900">
               <a:lnSpc>
-                <a:spcPct val="115000"/>
+                <a:spcPct val="90000"/>
               </a:lnSpc>
               <a:spcBef>
-                <a:spcPts val="0"/>
-              </a:spcBef>
-              <a:spcAft>
-                <a:spcPts val="0"/>
-              </a:spcAft>
+                <a:spcPts val="1000"/>
+              </a:spcBef>
               <a:buClr>
                 <a:srgbClr val="00497A"/>
               </a:buClr>
@@ -11687,78 +13122,22 @@
               <a:buChar char="•"/>
             </a:pPr>
             <a:r>
-              <a:rPr lang="ru-RU" sz="1800" dirty="0" err="1">
+              <a:rPr lang="ru-RU" sz="1800" dirty="0">
                 <a:solidFill>
                   <a:srgbClr val="00497A"/>
                 </a:solidFill>
-                <a:latin typeface="Arial"/>
-                <a:ea typeface="Arial"/>
-                <a:cs typeface="Arial"/>
-                <a:sym typeface="Arial"/>
-              </a:rPr>
-              <a:t>Clean</a:t>
-            </a:r>
-            <a:r>
-              <a:rPr lang="ru-RU" sz="1800" dirty="0">
-                <a:solidFill>
-                  <a:srgbClr val="00497A"/>
-                </a:solidFill>
-                <a:latin typeface="Arial"/>
-                <a:ea typeface="Arial"/>
-                <a:cs typeface="Arial"/>
-                <a:sym typeface="Arial"/>
-              </a:rPr>
-              <a:t> </a:t>
-            </a:r>
-            <a:r>
-              <a:rPr lang="ru-RU" sz="1800" dirty="0" err="1">
-                <a:solidFill>
-                  <a:srgbClr val="00497A"/>
-                </a:solidFill>
-                <a:latin typeface="Arial"/>
-                <a:ea typeface="Arial"/>
-                <a:cs typeface="Arial"/>
-                <a:sym typeface="Arial"/>
-              </a:rPr>
-              <a:t>Architecture</a:t>
-            </a:r>
-            <a:r>
-              <a:rPr lang="ru-RU" sz="1800" dirty="0">
-                <a:solidFill>
-                  <a:srgbClr val="00497A"/>
-                </a:solidFill>
-                <a:latin typeface="Arial"/>
-                <a:ea typeface="Arial"/>
-                <a:cs typeface="Arial"/>
-                <a:sym typeface="Arial"/>
-              </a:rPr>
-              <a:t> в каждом модуле </a:t>
-            </a:r>
-            <a:r>
-              <a:rPr lang="ru-RU" sz="1800" dirty="0" err="1">
-                <a:solidFill>
-                  <a:srgbClr val="00497A"/>
-                </a:solidFill>
-                <a:latin typeface="Arial"/>
-                <a:ea typeface="Arial"/>
-                <a:cs typeface="Arial"/>
-                <a:sym typeface="Arial"/>
-              </a:rPr>
-              <a:t>feature</a:t>
-            </a:r>
-            <a:endParaRPr dirty="0"/>
-          </a:p>
-          <a:p>
-            <a:pPr marL="285750" marR="0" lvl="0" indent="-285750" algn="l" rtl="0">
+              </a:rPr>
+              <a:t>Каждый функциональный модуль разделён на слои данных, бизнес-логики и представления.</a:t>
+            </a:r>
+          </a:p>
+          <a:p>
+            <a:pPr marL="457200" indent="-342900">
               <a:lnSpc>
-                <a:spcPct val="115000"/>
+                <a:spcPct val="90000"/>
               </a:lnSpc>
               <a:spcBef>
-                <a:spcPts val="0"/>
-              </a:spcBef>
-              <a:spcAft>
-                <a:spcPts val="0"/>
-              </a:spcAft>
+                <a:spcPts val="1000"/>
+              </a:spcBef>
               <a:buClr>
                 <a:srgbClr val="00497A"/>
               </a:buClr>
@@ -11771,46 +13150,9 @@
                 <a:solidFill>
                   <a:srgbClr val="00497A"/>
                 </a:solidFill>
-                <a:latin typeface="Arial"/>
-                <a:ea typeface="Arial"/>
-                <a:cs typeface="Arial"/>
-                <a:sym typeface="Arial"/>
-              </a:rPr>
-              <a:t>MVVM на </a:t>
-            </a:r>
-            <a:r>
-              <a:rPr lang="ru-RU" sz="1800" dirty="0" err="1">
-                <a:solidFill>
-                  <a:srgbClr val="00497A"/>
-                </a:solidFill>
-                <a:latin typeface="Arial"/>
-                <a:ea typeface="Arial"/>
-                <a:cs typeface="Arial"/>
-                <a:sym typeface="Arial"/>
-              </a:rPr>
-              <a:t>presentation</a:t>
-            </a:r>
-            <a:r>
-              <a:rPr lang="ru-RU" sz="1800" dirty="0">
-                <a:solidFill>
-                  <a:srgbClr val="00497A"/>
-                </a:solidFill>
-                <a:latin typeface="Arial"/>
-                <a:ea typeface="Arial"/>
-                <a:cs typeface="Arial"/>
-                <a:sym typeface="Arial"/>
-              </a:rPr>
-              <a:t> слое</a:t>
-            </a:r>
-            <a:endParaRPr sz="1800" dirty="0">
-              <a:solidFill>
-                <a:srgbClr val="00497A"/>
-              </a:solidFill>
-              <a:latin typeface="Arial"/>
-              <a:ea typeface="Arial"/>
-              <a:cs typeface="Arial"/>
-              <a:sym typeface="Arial"/>
-            </a:endParaRPr>
+              </a:rPr>
+              <a:t>На уровне интерфейса используется паттерн MVVM, который позволяет отделить логику приложения от пользовательского интерфейса.</a:t>
+            </a:r>
           </a:p>
           <a:p>
             <a:pPr marL="285750" marR="0" lvl="0" indent="-285750" algn="l" rtl="0">
@@ -11830,37 +13172,52 @@
               <a:buFont typeface="Arial"/>
               <a:buChar char="•"/>
             </a:pPr>
-            <a:r>
-              <a:rPr lang="ru-RU" sz="1800" dirty="0" err="1">
-                <a:solidFill>
-                  <a:srgbClr val="00497A"/>
-                </a:solidFill>
-                <a:latin typeface="Arial"/>
-                <a:ea typeface="Arial"/>
-                <a:cs typeface="Arial"/>
-                <a:sym typeface="Arial"/>
-              </a:rPr>
-              <a:t>Build-logic</a:t>
-            </a:r>
-            <a:r>
-              <a:rPr lang="ru-RU" sz="1800" dirty="0">
-                <a:solidFill>
-                  <a:srgbClr val="00497A"/>
-                </a:solidFill>
-                <a:latin typeface="Arial"/>
-                <a:ea typeface="Arial"/>
-                <a:cs typeface="Arial"/>
-                <a:sym typeface="Arial"/>
-              </a:rPr>
-              <a:t> модуль для общей конфигурации модулей</a:t>
-            </a:r>
             <a:endParaRPr dirty="0"/>
+          </a:p>
+        </p:txBody>
+      </p:sp>
+      <p:sp>
+        <p:nvSpPr>
+          <p:cNvPr id="2" name="AutoShape 2" descr="Диаграмма архитектуры приложения"/>
+          <p:cNvSpPr>
+            <a:spLocks noChangeAspect="1" noChangeArrowheads="1"/>
+          </p:cNvSpPr>
+          <p:nvPr/>
+        </p:nvSpPr>
+        <p:spPr bwMode="auto">
+          <a:xfrm>
+            <a:off x="155575" y="-144463"/>
+            <a:ext cx="304800" cy="304801"/>
+          </a:xfrm>
+          <a:prstGeom prst="rect">
+            <a:avLst/>
+          </a:prstGeom>
+          <a:noFill/>
+          <a:extLst>
+            <a:ext uri="{909E8E84-426E-40DD-AFC4-6F175D3DCCD1}">
+              <a14:hiddenFill xmlns:a14="http://schemas.microsoft.com/office/drawing/2010/main">
+                <a:solidFill>
+                  <a:srgbClr val="FFFFFF"/>
+                </a:solidFill>
+              </a14:hiddenFill>
+            </a:ext>
+          </a:extLst>
+        </p:spPr>
+        <p:txBody>
+          <a:bodyPr vert="horz" wrap="square" lIns="91440" tIns="45720" rIns="91440" bIns="45720" numCol="1" anchor="t" anchorCtr="0" compatLnSpc="1">
+            <a:prstTxWarp prst="textNoShape">
+              <a:avLst/>
+            </a:prstTxWarp>
+          </a:bodyPr>
+          <a:lstStyle/>
+          <a:p>
+            <a:endParaRPr lang="ru-RU"/>
           </a:p>
         </p:txBody>
       </p:sp>
       <p:pic>
         <p:nvPicPr>
-          <p:cNvPr id="4" name="Рисунок 3"/>
+          <p:cNvPr id="3" name="Рисунок 2"/>
           <p:cNvPicPr>
             <a:picLocks noChangeAspect="1"/>
           </p:cNvPicPr>
@@ -11880,8 +13237,8 @@
         </p:blipFill>
         <p:spPr>
           <a:xfrm>
-            <a:off x="5360284" y="959596"/>
-            <a:ext cx="5299478" cy="5761879"/>
+            <a:off x="5316044" y="1392658"/>
+            <a:ext cx="6589111" cy="4391025"/>
           </a:xfrm>
           <a:prstGeom prst="rect">
             <a:avLst/>
@@ -13100,8 +14457,8 @@
         </p:nvSpPr>
         <p:spPr>
           <a:xfrm>
-            <a:off x="838200" y="4438950"/>
-            <a:ext cx="7473778" cy="1302823"/>
+            <a:off x="906161" y="4396377"/>
+            <a:ext cx="7570573" cy="1408670"/>
           </a:xfrm>
           <a:prstGeom prst="rect">
             <a:avLst/>
@@ -13150,29 +14507,55 @@
               <a:buChar char="•"/>
             </a:pPr>
             <a:r>
-              <a:rPr lang="ru-RU" sz="1600" dirty="0">
+              <a:rPr lang="ru-RU" sz="1600" dirty="0" smtClean="0">
                 <a:solidFill>
                   <a:srgbClr val="00497A"/>
                 </a:solidFill>
               </a:rPr>
-              <a:t>Потоковое воспроизведение — реализация </a:t>
-            </a:r>
-            <a:r>
-              <a:rPr lang="ru-RU" sz="1600" dirty="0" err="1">
+              <a:t>Прослушивание </a:t>
+            </a:r>
+            <a:r>
+              <a:rPr lang="ru-RU" sz="1600" dirty="0" smtClean="0">
                 <a:solidFill>
                   <a:srgbClr val="00497A"/>
                 </a:solidFill>
               </a:rPr>
-              <a:t>стриминга</a:t>
-            </a:r>
-            <a:r>
-              <a:rPr lang="ru-RU" sz="1600" dirty="0">
+              <a:t>скаченной музыки без </a:t>
+            </a:r>
+            <a:r>
+              <a:rPr lang="ru-RU" sz="1600" dirty="0" smtClean="0">
                 <a:solidFill>
                   <a:srgbClr val="00497A"/>
                 </a:solidFill>
               </a:rPr>
-              <a:t> без предварительной загрузки всего аудиофайла.</a:t>
-            </a:r>
+              <a:t>интернета</a:t>
+            </a:r>
+          </a:p>
+          <a:p>
+            <a:pPr marL="228600" indent="-228600">
+              <a:lnSpc>
+                <a:spcPct val="90000"/>
+              </a:lnSpc>
+              <a:buClr>
+                <a:srgbClr val="00497A"/>
+              </a:buClr>
+              <a:buSzPts val="1600"/>
+              <a:buFont typeface="Arial"/>
+              <a:buChar char="•"/>
+            </a:pPr>
+            <a:r>
+              <a:rPr lang="ru-RU" sz="1600" dirty="0" smtClean="0">
+                <a:solidFill>
+                  <a:srgbClr val="00497A"/>
+                </a:solidFill>
+              </a:rPr>
+              <a:t>Альбомы по исполнителям</a:t>
+            </a:r>
+            <a:endParaRPr lang="ru-RU" sz="1600" dirty="0">
+              <a:solidFill>
+                <a:srgbClr val="00497A"/>
+              </a:solidFill>
+            </a:endParaRPr>
           </a:p>
         </p:txBody>
       </p:sp>
